--- a/nop/05-slide-mon-hoc.pptx
+++ b/nop/05-slide-mon-hoc.pptx
@@ -50603,11 +50603,11 @@
                       </a:pPr>
                       <a:r>
                         <a:rPr b="1"/>
-                        <a:t>1.143</a:t>
+                        <a:t>510</a:t>
                       </a:r>
                       <a:r>
                         <a:rPr/>
-                        <a:t> · 406 ms</a:t>
+                        <a:t> · 150 ms</a:t>
                       </a:r>
                     </a:p>
                   </a:txBody>
@@ -50637,7 +50637,7 @@
                       </a:pPr>
                       <a:r>
                         <a:rPr/>
-                        <a:t>🟡</a:t>
+                        <a:t>✅</a:t>
                       </a:r>
                     </a:p>
                   </a:txBody>

--- a/nop/05-slide-mon-hoc.pptx
+++ b/nop/05-slide-mon-hoc.pptx
@@ -44049,8 +44049,8 @@
         </p:blipFill>
         <p:spPr bwMode="auto">
           <a:xfrm>
-            <a:off x="2489200" y="2324100"/>
-            <a:ext cx="7112000" cy="3848100"/>
+            <a:off x="2032000" y="2324100"/>
+            <a:ext cx="8039100" cy="3848100"/>
           </a:xfrm>
           <a:prstGeom prst="rect">
             <a:avLst/>
@@ -44624,353 +44624,45 @@
             </a:r>
             <a:r>
               <a:rPr/>
-              <a:t> — kể cả khi bằng 0.</a:t>
+              <a:t> — kể cả khi bằng 0. </a:t>
+            </a:r>
+            <a:r>
+              <a:rPr i="1"/>
+              <a:t>(Đối chứng: tách-ghép trên Tesseract chỉ +0,03 điểm)</a:t>
             </a:r>
           </a:p>
         </p:txBody>
       </p:sp>
-      <p:graphicFrame>
-        <p:nvGraphicFramePr>
-          <p:cNvPr id="6" name="Content Placeholder 5"/>
-          <p:cNvGraphicFramePr>
-            <a:graphicFrameLocks noGrp="1"/>
-          </p:cNvGraphicFramePr>
-          <p:nvPr>
-            <p:ph idx="1"/>
-          </p:nvPr>
-        </p:nvGraphicFramePr>
-        <p:xfrm>
-          <a:off x="762000" y="2324100"/>
-          <a:ext cx="10579100" cy="3848100"/>
-        </p:xfrm>
-        <a:graphic>
-          <a:graphicData uri="http://schemas.openxmlformats.org/drawingml/2006/table">
-            <a:tbl>
-              <a:tblPr firstRow="1" bandRow="1">
-                <a:tableStyleId>{45BEF19B-5B1D-4A26-B267-ECC71EF7E2D4}</a:tableStyleId>
-              </a:tblPr>
-              <a:tblGrid>
-                <a:gridCol w="3517900"/>
-                <a:gridCol w="3517900"/>
-                <a:gridCol w="3517900"/>
-              </a:tblGrid>
-              <a:tr h="0">
-                <a:tc>
-                  <a:txBody>
-                    <a:bodyPr/>
-                    <a:lstStyle/>
-                    <a:p>
-                      <a:pPr lvl="0" indent="0" marL="0">
-                        <a:buNone/>
-                      </a:pPr>
-                      <a:r>
-                        <a:rPr/>
-                        <a:t>Bước xử lý ảnh</a:t>
-                      </a:r>
-                    </a:p>
-                  </a:txBody>
-                  <a:tcPr/>
-                </a:tc>
-                <a:tc>
-                  <a:txBody>
-                    <a:bodyPr/>
-                    <a:lstStyle/>
-                    <a:p>
-                      <a:pPr lvl="0" indent="0" marL="0">
-                        <a:buNone/>
-                      </a:pPr>
-                      <a:r>
-                        <a:rPr/>
-                        <a:t>Cải thiện được</a:t>
-                      </a:r>
-                    </a:p>
-                  </a:txBody>
-                  <a:tcPr/>
-                </a:tc>
-                <a:tc>
-                  <a:txBody>
-                    <a:bodyPr/>
-                    <a:lstStyle/>
-                    <a:p>
-                      <a:pPr lvl="0" indent="0" marL="0">
-                        <a:buNone/>
-                      </a:pPr>
-                      <a:r>
-                        <a:rPr/>
-                        <a:t>Chi phí tính toán</a:t>
-                      </a:r>
-                    </a:p>
-                  </a:txBody>
-                  <a:tcPr/>
-                </a:tc>
-              </a:tr>
-              <a:tr h="0">
-                <a:tc>
-                  <a:txBody>
-                    <a:bodyPr/>
-                    <a:lstStyle/>
-                    <a:p>
-                      <a:pPr lvl="0" indent="0" marL="0">
-                        <a:buNone/>
-                      </a:pPr>
-                      <a:r>
-                        <a:rPr b="1"/>
-                        <a:t>Tách hai nửa + ghép ngang</a:t>
-                      </a:r>
-                    </a:p>
-                  </a:txBody>
-                </a:tc>
-                <a:tc>
-                  <a:txBody>
-                    <a:bodyPr/>
-                    <a:lstStyle/>
-                    <a:p>
-                      <a:pPr lvl="0" indent="0" marL="0">
-                        <a:buNone/>
-                      </a:pPr>
-                      <a:r>
-                        <a:rPr b="1"/>
-                        <a:t>+34,92 điểm</a:t>
-                      </a:r>
-                    </a:p>
-                  </a:txBody>
-                </a:tc>
-                <a:tc>
-                  <a:txBody>
-                    <a:bodyPr/>
-                    <a:lstStyle/>
-                    <a:p>
-                      <a:pPr lvl="0" indent="0" marL="0">
-                        <a:buNone/>
-                      </a:pPr>
-                      <a:r>
-                        <a:rPr/>
-                        <a:t>~0 ms</a:t>
-                      </a:r>
-                    </a:p>
-                  </a:txBody>
-                </a:tc>
-              </a:tr>
-              <a:tr h="0">
-                <a:tc>
-                  <a:txBody>
-                    <a:bodyPr/>
-                    <a:lstStyle/>
-                    <a:p>
-                      <a:pPr lvl="0" indent="0" marL="0">
-                        <a:buNone/>
-                      </a:pPr>
-                      <a:r>
-                        <a:rPr b="1"/>
-                        <a:t>Bộ luật hậu xử lý</a:t>
-                      </a:r>
-                    </a:p>
-                  </a:txBody>
-                </a:tc>
-                <a:tc>
-                  <a:txBody>
-                    <a:bodyPr/>
-                    <a:lstStyle/>
-                    <a:p>
-                      <a:pPr lvl="0" indent="0" marL="0">
-                        <a:buNone/>
-                      </a:pPr>
-                      <a:r>
-                        <a:rPr b="1"/>
-                        <a:t>+13,28 điểm</a:t>
-                      </a:r>
-                      <a:r>
-                        <a:rPr/>
-                        <a:t> · 372 sửa đúng, </a:t>
-                      </a:r>
-                      <a:r>
-                        <a:rPr b="1"/>
-                        <a:t>0 hỏng</a:t>
-                      </a:r>
-                    </a:p>
-                  </a:txBody>
-                </a:tc>
-                <a:tc>
-                  <a:txBody>
-                    <a:bodyPr/>
-                    <a:lstStyle/>
-                    <a:p>
-                      <a:pPr lvl="0" indent="0" marL="0">
-                        <a:buNone/>
-                      </a:pPr>
-                      <a:r>
-                        <a:rPr/>
-                        <a:t>0,03 ms</a:t>
-                      </a:r>
-                    </a:p>
-                  </a:txBody>
-                </a:tc>
-              </a:tr>
-              <a:tr h="0">
-                <a:tc>
-                  <a:txBody>
-                    <a:bodyPr/>
-                    <a:lstStyle/>
-                    <a:p>
-                      <a:pPr lvl="0" indent="0" marL="0">
-                        <a:buNone/>
-                      </a:pPr>
-                      <a:r>
-                        <a:rPr/>
-                        <a:t>Nắn hình + giãn dọc</a:t>
-                      </a:r>
-                    </a:p>
-                  </a:txBody>
-                </a:tc>
-                <a:tc>
-                  <a:txBody>
-                    <a:bodyPr/>
-                    <a:lstStyle/>
-                    <a:p>
-                      <a:pPr lvl="0" indent="0" marL="0">
-                        <a:buNone/>
-                      </a:pPr>
-                      <a:r>
-                        <a:rPr b="1"/>
-                        <a:t>+34 biển</a:t>
-                      </a:r>
-                    </a:p>
-                  </a:txBody>
-                </a:tc>
-                <a:tc>
-                  <a:txBody>
-                    <a:bodyPr/>
-                    <a:lstStyle/>
-                    <a:p>
-                      <a:pPr lvl="0" indent="0" marL="0">
-                        <a:buNone/>
-                      </a:pPr>
-                      <a:r>
-                        <a:rPr/>
-                        <a:t>+244 ms ở p95</a:t>
-                      </a:r>
-                    </a:p>
-                  </a:txBody>
-                </a:tc>
-              </a:tr>
-              <a:tr h="0">
-                <a:tc>
-                  <a:txBody>
-                    <a:bodyPr/>
-                    <a:lstStyle/>
-                    <a:p>
-                      <a:pPr lvl="0" indent="0" marL="0">
-                        <a:buNone/>
-                      </a:pPr>
-                      <a:r>
-                        <a:rPr/>
-                        <a:t>Siêu phân giải — đã </a:t>
-                      </a:r>
-                      <a:r>
-                        <a:rPr b="1"/>
-                        <a:t>tắt</a:t>
-                      </a:r>
-                    </a:p>
-                  </a:txBody>
-                </a:tc>
-                <a:tc>
-                  <a:txBody>
-                    <a:bodyPr/>
-                    <a:lstStyle/>
-                    <a:p>
-                      <a:pPr lvl="0" indent="0" marL="0">
-                        <a:buNone/>
-                      </a:pPr>
-                      <a:r>
-                        <a:rPr b="1"/>
-                        <a:t>0 biển</a:t>
-                      </a:r>
-                      <a:r>
-                        <a:rPr/>
-                        <a:t>, nhưng </a:t>
-                      </a:r>
-                      <a:r>
-                        <a:rPr b="1"/>
-                        <a:t>0/120 mẫu lọt cổng</a:t>
-                      </a:r>
-                    </a:p>
-                  </a:txBody>
-                </a:tc>
-                <a:tc>
-                  <a:txBody>
-                    <a:bodyPr/>
-                    <a:lstStyle/>
-                    <a:p>
-                      <a:pPr lvl="0" indent="0" marL="0">
-                        <a:buNone/>
-                      </a:pPr>
-                      <a:r>
-                        <a:rPr/>
-                        <a:t>+319 ms p95</a:t>
-                      </a:r>
-                    </a:p>
-                  </a:txBody>
-                </a:tc>
-              </a:tr>
-              <a:tr h="0">
-                <a:tc>
-                  <a:txBody>
-                    <a:bodyPr/>
-                    <a:lstStyle/>
-                    <a:p>
-                      <a:pPr lvl="0" indent="0" marL="0">
-                        <a:buNone/>
-                      </a:pPr>
-                      <a:r>
-                        <a:rPr i="1"/>
-                        <a:t>Đối chứng:</a:t>
-                      </a:r>
-                      <a:r>
-                        <a:rPr/>
-                        <a:t> tách-ghép trên </a:t>
-                      </a:r>
-                      <a:r>
-                        <a:rPr b="1"/>
-                        <a:t>Tesseract</a:t>
-                      </a:r>
-                    </a:p>
-                  </a:txBody>
-                </a:tc>
-                <a:tc>
-                  <a:txBody>
-                    <a:bodyPr/>
-                    <a:lstStyle/>
-                    <a:p>
-                      <a:pPr lvl="0" indent="0" marL="0">
-                        <a:buNone/>
-                      </a:pPr>
-                      <a:r>
-                        <a:rPr b="1"/>
-                        <a:t>+0,03 điểm</a:t>
-                      </a:r>
-                    </a:p>
-                  </a:txBody>
-                </a:tc>
-                <a:tc>
-                  <a:txBody>
-                    <a:bodyPr/>
-                    <a:lstStyle/>
-                    <a:p>
-                      <a:pPr lvl="0" indent="0" marL="0">
-                        <a:buNone/>
-                      </a:pPr>
-                      <a:r>
-                        <a:rPr/>
-                        <a:t>—</a:t>
-                      </a:r>
-                    </a:p>
-                  </a:txBody>
-                </a:tc>
-              </a:tr>
-            </a:tbl>
-          </a:graphicData>
-        </a:graphic>
-      </p:graphicFrame>
+      <p:pic>
+        <p:nvPicPr>
+          <p:cNvPr descr="figures/fig-mon-hoc-donggop.png" id="0" name="Picture 1"/>
+          <p:cNvPicPr>
+            <a:picLocks noGrp="1" noChangeAspect="1"/>
+          </p:cNvPicPr>
+          <p:nvPr/>
+        </p:nvPicPr>
+        <p:blipFill>
+          <a:blip r:embed="rId2"/>
+          <a:stretch>
+            <a:fillRect/>
+          </a:stretch>
+        </p:blipFill>
+        <p:spPr bwMode="auto">
+          <a:xfrm>
+            <a:off x="762000" y="2781300"/>
+            <a:ext cx="10579100" cy="2933700"/>
+          </a:xfrm>
+          <a:prstGeom prst="rect">
+            <a:avLst/>
+          </a:prstGeom>
+          <a:noFill/>
+          <a:ln w="9525">
+            <a:noFill/>
+            <a:headEnd/>
+            <a:tailEnd/>
+          </a:ln>
+        </p:spPr>
+      </p:pic>
       <p:sp>
         <p:nvSpPr>
           <p:cNvPr id="449" name="Google Shape;449;p31"/>
@@ -46364,7 +46056,7 @@
             </a:r>
             <a:r>
               <a:rPr b="1"/>
-              <a:t>mAP@0,5 = 0,9829</a:t>
+              <a:t>mAP@0.5 = 0,9829</a:t>
             </a:r>
           </a:p>
           <a:p>
@@ -47120,7 +46812,7 @@
                       </a:pPr>
                       <a:r>
                         <a:rPr/>
-                        <a:t>mAP@0,5 của bộ phát hiện</a:t>
+                        <a:t>mAP@0.5 của bộ phát hiện</a:t>
                       </a:r>
                     </a:p>
                   </a:txBody>
@@ -47631,325 +47323,41 @@
             </a:r>
             <a:r>
               <a:rPr/>
-              <a:t> — không khử thì đang đo trí nhớ.</a:t>
+              <a:t> — không khử thì đang đo trí nhớ</a:t>
             </a:r>
           </a:p>
         </p:txBody>
       </p:sp>
-      <p:graphicFrame>
-        <p:nvGraphicFramePr>
-          <p:cNvPr id="6" name="Content Placeholder 5"/>
-          <p:cNvGraphicFramePr>
-            <a:graphicFrameLocks noGrp="1"/>
-          </p:cNvGraphicFramePr>
-          <p:nvPr>
-            <p:ph idx="1"/>
-          </p:nvPr>
-        </p:nvGraphicFramePr>
-        <p:xfrm>
-          <a:off x="762000" y="2324100"/>
-          <a:ext cx="10579100" cy="3848100"/>
-        </p:xfrm>
-        <a:graphic>
-          <a:graphicData uri="http://schemas.openxmlformats.org/drawingml/2006/table">
-            <a:tbl>
-              <a:tblPr firstRow="1" bandRow="1">
-                <a:tableStyleId>{45BEF19B-5B1D-4A26-B267-ECC71EF7E2D4}</a:tableStyleId>
-              </a:tblPr>
-              <a:tblGrid>
-                <a:gridCol w="5283200"/>
-                <a:gridCol w="5283200"/>
-              </a:tblGrid>
-              <a:tr h="0">
-                <a:tc>
-                  <a:txBody>
-                    <a:bodyPr/>
-                    <a:lstStyle/>
-                    <a:p>
-                      <a:pPr lvl="0" indent="0" marL="0">
-                        <a:buNone/>
-                      </a:pPr>
-                      <a:r>
-                        <a:rPr/>
-                        <a:t>Bước</a:t>
-                      </a:r>
-                    </a:p>
-                  </a:txBody>
-                  <a:tcPr/>
-                </a:tc>
-                <a:tc>
-                  <a:txBody>
-                    <a:bodyPr/>
-                    <a:lstStyle/>
-                    <a:p>
-                      <a:pPr lvl="0" indent="0" marL="0">
-                        <a:buNone/>
-                      </a:pPr>
-                      <a:r>
-                        <a:rPr/>
-                        <a:t>Kết quả</a:t>
-                      </a:r>
-                    </a:p>
-                  </a:txBody>
-                  <a:tcPr/>
-                </a:tc>
-              </a:tr>
-              <a:tr h="0">
-                <a:tc>
-                  <a:txBody>
-                    <a:bodyPr/>
-                    <a:lstStyle/>
-                    <a:p>
-                      <a:pPr lvl="0" indent="0" marL="0">
-                        <a:buNone/>
-                      </a:pPr>
-                      <a:r>
-                        <a:rPr/>
-                        <a:t>Hợp nhất </a:t>
-                      </a:r>
-                      <a:r>
-                        <a:rPr b="1"/>
-                        <a:t>7 bộ công khai</a:t>
-                      </a:r>
-                    </a:p>
-                  </a:txBody>
-                </a:tc>
-                <a:tc>
-                  <a:txBody>
-                    <a:bodyPr/>
-                    <a:lstStyle/>
-                    <a:p>
-                      <a:pPr lvl="0" indent="0" marL="0">
-                        <a:buNone/>
-                      </a:pPr>
-                      <a:r>
-                        <a:rPr/>
-                        <a:t>27.111 ảnh</a:t>
-                      </a:r>
-                    </a:p>
-                  </a:txBody>
-                </a:tc>
-              </a:tr>
-              <a:tr h="0">
-                <a:tc>
-                  <a:txBody>
-                    <a:bodyPr/>
-                    <a:lstStyle/>
-                    <a:p>
-                      <a:pPr lvl="0" indent="0" marL="0">
-                        <a:buNone/>
-                      </a:pPr>
-                      <a:r>
-                        <a:rPr/>
-                        <a:t>Khử trùng lặp chéo bộ, băm tri giác </a:t>
-                      </a:r>
-                      <a:r>
-                        <a:rPr b="1"/>
-                        <a:t>DCT 64 bit</a:t>
-                      </a:r>
-                    </a:p>
-                  </a:txBody>
-                </a:tc>
-                <a:tc>
-                  <a:txBody>
-                    <a:bodyPr/>
-                    <a:lstStyle/>
-                    <a:p>
-                      <a:pPr lvl="0" indent="0" marL="0">
-                        <a:buNone/>
-                      </a:pPr>
-                      <a:r>
-                        <a:rPr/>
-                        <a:t>còn </a:t>
-                      </a:r>
-                      <a:r>
-                        <a:rPr b="1"/>
-                        <a:t>15.133</a:t>
-                      </a:r>
-                      <a:r>
-                        <a:rPr/>
-                        <a:t> ảnh · loại </a:t>
-                      </a:r>
-                      <a:r>
-                        <a:rPr b="1"/>
-                        <a:t>44,2%</a:t>
-                      </a:r>
-                    </a:p>
-                  </a:txBody>
-                </a:tc>
-              </a:tr>
-              <a:tr h="0">
-                <a:tc>
-                  <a:txBody>
-                    <a:bodyPr/>
-                    <a:lstStyle/>
-                    <a:p>
-                      <a:pPr lvl="0" indent="0" marL="0">
-                        <a:buNone/>
-                      </a:pPr>
-                      <a:r>
-                        <a:rPr/>
-                        <a:t>Ca cực đoan</a:t>
-                      </a:r>
-                    </a:p>
-                  </a:txBody>
-                </a:tc>
-                <a:tc>
-                  <a:txBody>
-                    <a:bodyPr/>
-                    <a:lstStyle/>
-                    <a:p>
-                      <a:pPr lvl="0" indent="0" marL="0">
-                        <a:buNone/>
-                      </a:pPr>
-                      <a:r>
-                        <a:rPr/>
-                        <a:t>một bộ vào </a:t>
-                      </a:r>
-                      <a:r>
-                        <a:rPr b="1"/>
-                        <a:t>1.005</a:t>
-                      </a:r>
-                      <a:r>
-                        <a:rPr/>
-                        <a:t> ảnh, ra </a:t>
-                      </a:r>
-                      <a:r>
-                        <a:rPr b="1"/>
-                        <a:t>0</a:t>
-                      </a:r>
-                      <a:r>
-                        <a:rPr/>
-                        <a:t> ảnh</a:t>
-                      </a:r>
-                    </a:p>
-                  </a:txBody>
-                </a:tc>
-              </a:tr>
-              <a:tr h="0">
-                <a:tc>
-                  <a:txBody>
-                    <a:bodyPr/>
-                    <a:lstStyle/>
-                    <a:p>
-                      <a:pPr lvl="0" indent="0" marL="0">
-                        <a:buNone/>
-                      </a:pPr>
-                      <a:r>
-                        <a:rPr/>
-                        <a:t>Băm đa chỉ mục (nguyên lý chuồng bồ câu)</a:t>
-                      </a:r>
-                    </a:p>
-                  </a:txBody>
-                </a:tc>
-                <a:tc>
-                  <a:txBody>
-                    <a:bodyPr/>
-                    <a:lstStyle/>
-                    <a:p>
-                      <a:pPr lvl="0" indent="0" marL="0">
-                        <a:buNone/>
-                      </a:pPr>
-                      <a:r>
-                        <a:rPr/>
-                        <a:t>thuật toán </a:t>
-                      </a:r>
-                      <a:r>
-                        <a:rPr b="1"/>
-                        <a:t>chính xác</a:t>
-                      </a:r>
-                      <a:r>
-                        <a:rPr/>
-                        <a:t>, không xấp xỉ</a:t>
-                      </a:r>
-                    </a:p>
-                  </a:txBody>
-                </a:tc>
-              </a:tr>
-              <a:tr h="0">
-                <a:tc>
-                  <a:txBody>
-                    <a:bodyPr/>
-                    <a:lstStyle/>
-                    <a:p>
-                      <a:pPr lvl="0" indent="0" marL="0">
-                        <a:buNone/>
-                      </a:pPr>
-                      <a:r>
-                        <a:rPr/>
-                        <a:t>Chia tập, giữ nhóm trùng cùng một bên</a:t>
-                      </a:r>
-                    </a:p>
-                  </a:txBody>
-                </a:tc>
-                <a:tc>
-                  <a:txBody>
-                    <a:bodyPr/>
-                    <a:lstStyle/>
-                    <a:p>
-                      <a:pPr lvl="0" indent="0" marL="0">
-                        <a:buNone/>
-                      </a:pPr>
-                      <a:r>
-                        <a:rPr/>
-                        <a:t>10.592 / 3.027 / </a:t>
-                      </a:r>
-                      <a:r>
-                        <a:rPr b="1"/>
-                        <a:t>1.514</a:t>
-                      </a:r>
-                    </a:p>
-                  </a:txBody>
-                </a:tc>
-              </a:tr>
-              <a:tr h="0">
-                <a:tc>
-                  <a:txBody>
-                    <a:bodyPr/>
-                    <a:lstStyle/>
-                    <a:p>
-                      <a:pPr lvl="0" indent="0" marL="0">
-                        <a:buNone/>
-                      </a:pPr>
-                      <a:r>
-                        <a:rPr b="1"/>
-                        <a:t>Giới hạn còn lại</a:t>
-                      </a:r>
-                    </a:p>
-                  </a:txBody>
-                </a:tc>
-                <a:tc>
-                  <a:txBody>
-                    <a:bodyPr/>
-                    <a:lstStyle/>
-                    <a:p>
-                      <a:pPr lvl="0" indent="0" marL="0">
-                        <a:buNone/>
-                      </a:pPr>
-                      <a:r>
-                        <a:rPr/>
-                        <a:t>pHash tóm tắt </a:t>
-                      </a:r>
-                      <a:r>
-                        <a:rPr b="1"/>
-                        <a:t>khung ảnh</a:t>
-                      </a:r>
-                      <a:r>
-                        <a:rPr/>
-                        <a:t>, không tóm tắt </a:t>
-                      </a:r>
-                      <a:r>
-                        <a:rPr b="1"/>
-                        <a:t>chiếc xe</a:t>
-                      </a:r>
-                    </a:p>
-                  </a:txBody>
-                </a:tc>
-              </a:tr>
-            </a:tbl>
-          </a:graphicData>
-        </a:graphic>
-      </p:graphicFrame>
+      <p:pic>
+        <p:nvPicPr>
+          <p:cNvPr descr="figures/fig-mon-hoc-funnel.png" id="0" name="Picture 1"/>
+          <p:cNvPicPr>
+            <a:picLocks noGrp="1" noChangeAspect="1"/>
+          </p:cNvPicPr>
+          <p:nvPr/>
+        </p:nvPicPr>
+        <p:blipFill>
+          <a:blip r:embed="rId2"/>
+          <a:stretch>
+            <a:fillRect/>
+          </a:stretch>
+        </p:blipFill>
+        <p:spPr bwMode="auto">
+          <a:xfrm>
+            <a:off x="1320800" y="2324100"/>
+            <a:ext cx="9474200" cy="3848100"/>
+          </a:xfrm>
+          <a:prstGeom prst="rect">
+            <a:avLst/>
+          </a:prstGeom>
+          <a:noFill/>
+          <a:ln w="9525">
+            <a:noFill/>
+            <a:headEnd/>
+            <a:tailEnd/>
+          </a:ln>
+        </p:spPr>
+      </p:pic>
       <p:sp>
         <p:nvSpPr>
           <p:cNvPr id="449" name="Google Shape;449;p31"/>
@@ -50102,551 +49510,41 @@
             </a:r>
             <a:r>
               <a:rPr/>
-              <a:t>.</a:t>
+              <a:t> — riêng biển một dòng đạt 0,9541</a:t>
             </a:r>
           </a:p>
         </p:txBody>
       </p:sp>
-      <p:graphicFrame>
-        <p:nvGraphicFramePr>
-          <p:cNvPr id="6" name="Content Placeholder 5"/>
-          <p:cNvGraphicFramePr>
-            <a:graphicFrameLocks noGrp="1"/>
-          </p:cNvGraphicFramePr>
-          <p:nvPr>
-            <p:ph idx="1"/>
-          </p:nvPr>
-        </p:nvGraphicFramePr>
-        <p:xfrm>
-          <a:off x="762000" y="2324100"/>
-          <a:ext cx="10579100" cy="3848100"/>
-        </p:xfrm>
-        <a:graphic>
-          <a:graphicData uri="http://schemas.openxmlformats.org/drawingml/2006/table">
-            <a:tbl>
-              <a:tblPr firstRow="1" bandRow="1">
-                <a:tableStyleId>{45BEF19B-5B1D-4A26-B267-ECC71EF7E2D4}</a:tableStyleId>
-              </a:tblPr>
-              <a:tblGrid>
-                <a:gridCol w="2641600"/>
-                <a:gridCol w="2641600"/>
-                <a:gridCol w="2641600"/>
-                <a:gridCol w="2641600"/>
-              </a:tblGrid>
-              <a:tr h="0">
-                <a:tc>
-                  <a:txBody>
-                    <a:bodyPr/>
-                    <a:lstStyle/>
-                    <a:p>
-                      <a:pPr lvl="0" indent="0" marL="0">
-                        <a:buNone/>
-                      </a:pPr>
-                      <a:r>
-                        <a:rPr/>
-                        <a:t>Đo cái gì</a:t>
-                      </a:r>
-                    </a:p>
-                  </a:txBody>
-                  <a:tcPr/>
-                </a:tc>
-                <a:tc>
-                  <a:txBody>
-                    <a:bodyPr/>
-                    <a:lstStyle/>
-                    <a:p>
-                      <a:pPr lvl="0" indent="0" marL="0">
-                        <a:buNone/>
-                      </a:pPr>
-                      <a:r>
-                        <a:rPr/>
-                        <a:t>Đo được</a:t>
-                      </a:r>
-                    </a:p>
-                  </a:txBody>
-                  <a:tcPr/>
-                </a:tc>
-                <a:tc>
-                  <a:txBody>
-                    <a:bodyPr/>
-                    <a:lstStyle/>
-                    <a:p>
-                      <a:pPr lvl="0" indent="0" marL="0">
-                        <a:buNone/>
-                      </a:pPr>
-                      <a:r>
-                        <a:rPr/>
-                        <a:t>Ngưỡng</a:t>
-                      </a:r>
-                    </a:p>
-                  </a:txBody>
-                  <a:tcPr/>
-                </a:tc>
-                <a:tc>
-                  <a:txBody>
-                    <a:bodyPr/>
-                    <a:lstStyle/>
-                    <a:p>
-                      <a:endParaRPr/>
-                    </a:p>
-                  </a:txBody>
-                  <a:tcPr/>
-                </a:tc>
-              </a:tr>
-              <a:tr h="0">
-                <a:tc>
-                  <a:txBody>
-                    <a:bodyPr/>
-                    <a:lstStyle/>
-                    <a:p>
-                      <a:pPr lvl="0" indent="0" marL="0">
-                        <a:buNone/>
-                      </a:pPr>
-                      <a:r>
-                        <a:rPr/>
-                        <a:t>mAP@0,5 · mAP@0,5:0,95</a:t>
-                      </a:r>
-                    </a:p>
-                  </a:txBody>
-                </a:tc>
-                <a:tc>
-                  <a:txBody>
-                    <a:bodyPr/>
-                    <a:lstStyle/>
-                    <a:p>
-                      <a:pPr lvl="0" indent="0" marL="0">
-                        <a:buNone/>
-                      </a:pPr>
-                      <a:r>
-                        <a:rPr b="1"/>
-                        <a:t>0,9829</a:t>
-                      </a:r>
-                      <a:r>
-                        <a:rPr/>
-                        <a:t> · 0,7834</a:t>
-                      </a:r>
-                    </a:p>
-                  </a:txBody>
-                </a:tc>
-                <a:tc>
-                  <a:txBody>
-                    <a:bodyPr/>
-                    <a:lstStyle/>
-                    <a:p>
-                      <a:pPr lvl="0" indent="0" marL="0">
-                        <a:buNone/>
-                      </a:pPr>
-                      <a:r>
-                        <a:rPr/>
-                        <a:t>0,90 · 0,65</a:t>
-                      </a:r>
-                    </a:p>
-                  </a:txBody>
-                </a:tc>
-                <a:tc>
-                  <a:txBody>
-                    <a:bodyPr/>
-                    <a:lstStyle/>
-                    <a:p>
-                      <a:pPr lvl="0" indent="0" marL="0" algn="ctr">
-                        <a:buNone/>
-                      </a:pPr>
-                      <a:r>
-                        <a:rPr/>
-                        <a:t>✅</a:t>
-                      </a:r>
-                    </a:p>
-                  </a:txBody>
-                </a:tc>
-              </a:tr>
-              <a:tr h="0">
-                <a:tc>
-                  <a:txBody>
-                    <a:bodyPr/>
-                    <a:lstStyle/>
-                    <a:p>
-                      <a:pPr lvl="0" indent="0" marL="0">
-                        <a:buNone/>
-                      </a:pPr>
-                      <a:r>
-                        <a:rPr/>
-                        <a:t>Precision · Recall</a:t>
-                      </a:r>
-                    </a:p>
-                  </a:txBody>
-                </a:tc>
-                <a:tc>
-                  <a:txBody>
-                    <a:bodyPr/>
-                    <a:lstStyle/>
-                    <a:p>
-                      <a:pPr lvl="0" indent="0" marL="0">
-                        <a:buNone/>
-                      </a:pPr>
-                      <a:r>
-                        <a:rPr/>
-                        <a:t>0,9837 · 0,9714</a:t>
-                      </a:r>
-                    </a:p>
-                  </a:txBody>
-                </a:tc>
-                <a:tc>
-                  <a:txBody>
-                    <a:bodyPr/>
-                    <a:lstStyle/>
-                    <a:p>
-                      <a:pPr lvl="0" indent="0" marL="0">
-                        <a:buNone/>
-                      </a:pPr>
-                      <a:r>
-                        <a:rPr/>
-                        <a:t>0,92 · 0,90</a:t>
-                      </a:r>
-                    </a:p>
-                  </a:txBody>
-                </a:tc>
-                <a:tc>
-                  <a:txBody>
-                    <a:bodyPr/>
-                    <a:lstStyle/>
-                    <a:p>
-                      <a:pPr lvl="0" indent="0" marL="0" algn="ctr">
-                        <a:buNone/>
-                      </a:pPr>
-                      <a:r>
-                        <a:rPr/>
-                        <a:t>✅</a:t>
-                      </a:r>
-                    </a:p>
-                  </a:txBody>
-                </a:tc>
-              </a:tr>
-              <a:tr h="0">
-                <a:tc>
-                  <a:txBody>
-                    <a:bodyPr/>
-                    <a:lstStyle/>
-                    <a:p>
-                      <a:pPr lvl="0" indent="0" marL="0">
-                        <a:buNone/>
-                      </a:pPr>
-                      <a:r>
-                        <a:rPr/>
-                        <a:t>Đúng mức ký tự (1 − CER)</a:t>
-                      </a:r>
-                    </a:p>
-                  </a:txBody>
-                </a:tc>
-                <a:tc>
-                  <a:txBody>
-                    <a:bodyPr/>
-                    <a:lstStyle/>
-                    <a:p>
-                      <a:pPr lvl="0" indent="0" marL="0">
-                        <a:buNone/>
-                      </a:pPr>
-                      <a:r>
-                        <a:rPr b="1"/>
-                        <a:t>0,9483</a:t>
-                      </a:r>
-                    </a:p>
-                  </a:txBody>
-                </a:tc>
-                <a:tc>
-                  <a:txBody>
-                    <a:bodyPr/>
-                    <a:lstStyle/>
-                    <a:p>
-                      <a:pPr lvl="0" indent="0" marL="0">
-                        <a:buNone/>
-                      </a:pPr>
-                      <a:r>
-                        <a:rPr/>
-                        <a:t>0,95</a:t>
-                      </a:r>
-                    </a:p>
-                  </a:txBody>
-                </a:tc>
-                <a:tc>
-                  <a:txBody>
-                    <a:bodyPr/>
-                    <a:lstStyle/>
-                    <a:p>
-                      <a:pPr lvl="0" indent="0" marL="0" algn="ctr">
-                        <a:buNone/>
-                      </a:pPr>
-                      <a:r>
-                        <a:rPr/>
-                        <a:t>🟡</a:t>
-                      </a:r>
-                    </a:p>
-                  </a:txBody>
-                </a:tc>
-              </a:tr>
-              <a:tr h="0">
-                <a:tc>
-                  <a:txBody>
-                    <a:bodyPr/>
-                    <a:lstStyle/>
-                    <a:p>
-                      <a:pPr lvl="0" indent="0" marL="0">
-                        <a:buNone/>
-                      </a:pPr>
-                      <a:r>
-                        <a:rPr/>
-                        <a:t>Đúng cả chuỗi, sau hậu xử lý</a:t>
-                      </a:r>
-                    </a:p>
-                  </a:txBody>
-                </a:tc>
-                <a:tc>
-                  <a:txBody>
-                    <a:bodyPr/>
-                    <a:lstStyle/>
-                    <a:p>
-                      <a:pPr lvl="0" indent="0" marL="0">
-                        <a:buNone/>
-                      </a:pPr>
-                      <a:r>
-                        <a:rPr b="1"/>
-                        <a:t>0,7701</a:t>
-                      </a:r>
-                    </a:p>
-                  </a:txBody>
-                </a:tc>
-                <a:tc>
-                  <a:txBody>
-                    <a:bodyPr/>
-                    <a:lstStyle/>
-                    <a:p>
-                      <a:pPr lvl="0" indent="0" marL="0">
-                        <a:buNone/>
-                      </a:pPr>
-                      <a:r>
-                        <a:rPr/>
-                        <a:t>0,90</a:t>
-                      </a:r>
-                    </a:p>
-                  </a:txBody>
-                </a:tc>
-                <a:tc>
-                  <a:txBody>
-                    <a:bodyPr/>
-                    <a:lstStyle/>
-                    <a:p>
-                      <a:pPr lvl="0" indent="0" marL="0" algn="ctr">
-                        <a:buNone/>
-                      </a:pPr>
-                      <a:r>
-                        <a:rPr/>
-                        <a:t>❌</a:t>
-                      </a:r>
-                    </a:p>
-                  </a:txBody>
-                </a:tc>
-              </a:tr>
-              <a:tr h="0">
-                <a:tc>
-                  <a:txBody>
-                    <a:bodyPr/>
-                    <a:lstStyle/>
-                    <a:p>
-                      <a:pPr lvl="0" indent="0" marL="0">
-                        <a:buNone/>
-                      </a:pPr>
-                      <a:r>
-                        <a:rPr/>
-                        <a:t>— riêng biển </a:t>
-                      </a:r>
-                      <a:r>
-                        <a:rPr b="1"/>
-                        <a:t>một dòng</a:t>
-                      </a:r>
-                    </a:p>
-                  </a:txBody>
-                </a:tc>
-                <a:tc>
-                  <a:txBody>
-                    <a:bodyPr/>
-                    <a:lstStyle/>
-                    <a:p>
-                      <a:pPr lvl="0" indent="0" marL="0">
-                        <a:buNone/>
-                      </a:pPr>
-                      <a:r>
-                        <a:rPr b="1"/>
-                        <a:t>0,9541</a:t>
-                      </a:r>
-                    </a:p>
-                  </a:txBody>
-                </a:tc>
-                <a:tc>
-                  <a:txBody>
-                    <a:bodyPr/>
-                    <a:lstStyle/>
-                    <a:p>
-                      <a:pPr lvl="0" indent="0" marL="0">
-                        <a:buNone/>
-                      </a:pPr>
-                      <a:r>
-                        <a:rPr/>
-                        <a:t>0,90</a:t>
-                      </a:r>
-                    </a:p>
-                  </a:txBody>
-                </a:tc>
-                <a:tc>
-                  <a:txBody>
-                    <a:bodyPr/>
-                    <a:lstStyle/>
-                    <a:p>
-                      <a:pPr lvl="0" indent="0" marL="0" algn="ctr">
-                        <a:buNone/>
-                      </a:pPr>
-                      <a:r>
-                        <a:rPr/>
-                        <a:t>✅</a:t>
-                      </a:r>
-                    </a:p>
-                  </a:txBody>
-                </a:tc>
-              </a:tr>
-              <a:tr h="0">
-                <a:tc>
-                  <a:txBody>
-                    <a:bodyPr/>
-                    <a:lstStyle/>
-                    <a:p>
-                      <a:pPr lvl="0" indent="0" marL="0">
-                        <a:buNone/>
-                      </a:pPr>
-                      <a:r>
-                        <a:rPr/>
-                        <a:t>— riêng biển </a:t>
-                      </a:r>
-                      <a:r>
-                        <a:rPr b="1"/>
-                        <a:t>hai dòng</a:t>
-                      </a:r>
-                    </a:p>
-                  </a:txBody>
-                </a:tc>
-                <a:tc>
-                  <a:txBody>
-                    <a:bodyPr/>
-                    <a:lstStyle/>
-                    <a:p>
-                      <a:pPr lvl="0" indent="0" marL="0">
-                        <a:buNone/>
-                      </a:pPr>
-                      <a:r>
-                        <a:rPr b="1"/>
-                        <a:t>0,7234</a:t>
-                      </a:r>
-                    </a:p>
-                  </a:txBody>
-                </a:tc>
-                <a:tc>
-                  <a:txBody>
-                    <a:bodyPr/>
-                    <a:lstStyle/>
-                    <a:p>
-                      <a:pPr lvl="0" indent="0" marL="0">
-                        <a:buNone/>
-                      </a:pPr>
-                      <a:r>
-                        <a:rPr/>
-                        <a:t>0,90</a:t>
-                      </a:r>
-                    </a:p>
-                  </a:txBody>
-                </a:tc>
-                <a:tc>
-                  <a:txBody>
-                    <a:bodyPr/>
-                    <a:lstStyle/>
-                    <a:p>
-                      <a:pPr lvl="0" indent="0" marL="0" algn="ctr">
-                        <a:buNone/>
-                      </a:pPr>
-                      <a:r>
-                        <a:rPr/>
-                        <a:t>❌</a:t>
-                      </a:r>
-                    </a:p>
-                  </a:txBody>
-                </a:tc>
-              </a:tr>
-              <a:tr h="0">
-                <a:tc>
-                  <a:txBody>
-                    <a:bodyPr/>
-                    <a:lstStyle/>
-                    <a:p>
-                      <a:pPr lvl="0" indent="0" marL="0">
-                        <a:buNone/>
-                      </a:pPr>
-                      <a:r>
-                        <a:rPr/>
-                        <a:t>Độ trễ p95 · trung vị, CPU</a:t>
-                      </a:r>
-                    </a:p>
-                  </a:txBody>
-                </a:tc>
-                <a:tc>
-                  <a:txBody>
-                    <a:bodyPr/>
-                    <a:lstStyle/>
-                    <a:p>
-                      <a:pPr lvl="0" indent="0" marL="0">
-                        <a:buNone/>
-                      </a:pPr>
-                      <a:r>
-                        <a:rPr b="1"/>
-                        <a:t>510</a:t>
-                      </a:r>
-                      <a:r>
-                        <a:rPr/>
-                        <a:t> · 150 ms</a:t>
-                      </a:r>
-                    </a:p>
-                  </a:txBody>
-                </a:tc>
-                <a:tc>
-                  <a:txBody>
-                    <a:bodyPr/>
-                    <a:lstStyle/>
-                    <a:p>
-                      <a:pPr lvl="0" indent="0" marL="0">
-                        <a:buNone/>
-                      </a:pPr>
-                      <a:r>
-                        <a:rPr/>
-                        <a:t>≤ 800 ms</a:t>
-                      </a:r>
-                    </a:p>
-                  </a:txBody>
-                </a:tc>
-                <a:tc>
-                  <a:txBody>
-                    <a:bodyPr/>
-                    <a:lstStyle/>
-                    <a:p>
-                      <a:pPr lvl="0" indent="0" marL="0" algn="ctr">
-                        <a:buNone/>
-                      </a:pPr>
-                      <a:r>
-                        <a:rPr/>
-                        <a:t>✅</a:t>
-                      </a:r>
-                    </a:p>
-                  </a:txBody>
-                </a:tc>
-              </a:tr>
-            </a:tbl>
-          </a:graphicData>
-        </a:graphic>
-      </p:graphicFrame>
+      <p:pic>
+        <p:nvPicPr>
+          <p:cNvPr descr="figures/fig-mon-hoc-kpi.png" id="0" name="Picture 1"/>
+          <p:cNvPicPr>
+            <a:picLocks noGrp="1" noChangeAspect="1"/>
+          </p:cNvPicPr>
+          <p:nvPr/>
+        </p:nvPicPr>
+        <p:blipFill>
+          <a:blip r:embed="rId2"/>
+          <a:stretch>
+            <a:fillRect/>
+          </a:stretch>
+        </p:blipFill>
+        <p:spPr bwMode="auto">
+          <a:xfrm>
+            <a:off x="762000" y="2781300"/>
+            <a:ext cx="10579100" cy="2933700"/>
+          </a:xfrm>
+          <a:prstGeom prst="rect">
+            <a:avLst/>
+          </a:prstGeom>
+          <a:noFill/>
+          <a:ln w="9525">
+            <a:noFill/>
+            <a:headEnd/>
+            <a:tailEnd/>
+          </a:ln>
+        </p:spPr>
+      </p:pic>
       <p:sp>
         <p:nvSpPr>
           <p:cNvPr id="449" name="Google Shape;449;p31"/>
